--- a/templates/carousels/teachers-day-instructors.pptx
+++ b/templates/carousels/teachers-day-instructors.pptx
@@ -5066,13 +5066,14 @@
           <a:p>
             <a:pPr algn="l"/>
             <a:r>
-              <a:rPr sz="3150" b="0">
+              <a:rPr sz="3900" b="0">
                 <a:solidFill>
                   <a:srgbClr val="333130"/>
                 </a:solidFill>
                 <a:latin typeface="Source Sans 3"/>
               </a:rPr>
-              <a:t>[COPY: Allison] Bio in three or four short lines: years teaching with the School, what they teach, one fun detail about their life or land.</a:t>
+              <a:t>[COPY: Allison] Bio, three short lines.
+Years teaching, what they teach, one fun detail.</a:t>
             </a:r>
           </a:p>
         </p:txBody>
@@ -5400,7 +5401,7 @@
           <a:p>
             <a:pPr algn="ctr"/>
             <a:r>
-              <a:rPr sz="1950" b="1">
+              <a:rPr sz="2400" b="1">
                 <a:solidFill>
                   <a:srgbClr val="FFFFFF"/>
                 </a:solidFill>
@@ -5479,7 +5480,7 @@
           <a:p>
             <a:pPr algn="ctr"/>
             <a:r>
-              <a:rPr sz="1800" b="1">
+              <a:rPr sz="2400" b="1">
                 <a:solidFill>
                   <a:srgbClr val="F4F1EA"/>
                 </a:solidFill>
@@ -6615,13 +6616,14 @@
           <a:p>
             <a:pPr algn="l"/>
             <a:r>
-              <a:rPr sz="3150" b="0">
+              <a:rPr sz="3900" b="0">
                 <a:solidFill>
                   <a:srgbClr val="333130"/>
                 </a:solidFill>
                 <a:latin typeface="Source Sans 3"/>
               </a:rPr>
-              <a:t>[COPY: Allison] Bio in three or four short lines: years teaching with the School, what they teach, one fun detail about their life or land.</a:t>
+              <a:t>[COPY: Allison] Bio, three short lines.
+Years teaching, what they teach, one fun detail.</a:t>
             </a:r>
           </a:p>
         </p:txBody>
@@ -6949,7 +6951,7 @@
           <a:p>
             <a:pPr algn="ctr"/>
             <a:r>
-              <a:rPr sz="1950" b="1">
+              <a:rPr sz="2400" b="1">
                 <a:solidFill>
                   <a:srgbClr val="FFFFFF"/>
                 </a:solidFill>
@@ -7028,7 +7030,7 @@
           <a:p>
             <a:pPr algn="ctr"/>
             <a:r>
-              <a:rPr sz="1800" b="1">
+              <a:rPr sz="2400" b="1">
                 <a:solidFill>
                   <a:srgbClr val="F4F1EA"/>
                 </a:solidFill>
@@ -8164,13 +8166,14 @@
           <a:p>
             <a:pPr algn="l"/>
             <a:r>
-              <a:rPr sz="3150" b="0">
+              <a:rPr sz="3900" b="0">
                 <a:solidFill>
                   <a:srgbClr val="333130"/>
                 </a:solidFill>
                 <a:latin typeface="Source Sans 3"/>
               </a:rPr>
-              <a:t>[COPY: Allison] Bio in three or four short lines: years teaching with the School, what they teach, one fun detail about their life or land.</a:t>
+              <a:t>[COPY: Allison] Bio, three short lines.
+Years teaching, what they teach, one fun detail.</a:t>
             </a:r>
           </a:p>
         </p:txBody>
@@ -8498,7 +8501,7 @@
           <a:p>
             <a:pPr algn="ctr"/>
             <a:r>
-              <a:rPr sz="1950" b="1">
+              <a:rPr sz="2400" b="1">
                 <a:solidFill>
                   <a:srgbClr val="FFFFFF"/>
                 </a:solidFill>
@@ -8577,7 +8580,7 @@
           <a:p>
             <a:pPr algn="ctr"/>
             <a:r>
-              <a:rPr sz="1800" b="1">
+              <a:rPr sz="2400" b="1">
                 <a:solidFill>
                   <a:srgbClr val="F4F1EA"/>
                 </a:solidFill>
@@ -9713,13 +9716,14 @@
           <a:p>
             <a:pPr algn="l"/>
             <a:r>
-              <a:rPr sz="3150" b="0">
+              <a:rPr sz="3900" b="0">
                 <a:solidFill>
                   <a:srgbClr val="333130"/>
                 </a:solidFill>
                 <a:latin typeface="Source Sans 3"/>
               </a:rPr>
-              <a:t>[COPY: Allison] Bio in three or four short lines: years teaching with the School, what they teach, one fun detail about their life or land.</a:t>
+              <a:t>[COPY: Allison] Bio, three short lines.
+Years teaching, what they teach, one fun detail.</a:t>
             </a:r>
           </a:p>
         </p:txBody>
@@ -10047,7 +10051,7 @@
           <a:p>
             <a:pPr algn="ctr"/>
             <a:r>
-              <a:rPr sz="1950" b="1">
+              <a:rPr sz="2400" b="1">
                 <a:solidFill>
                   <a:srgbClr val="FFFFFF"/>
                 </a:solidFill>
@@ -10126,7 +10130,7 @@
           <a:p>
             <a:pPr algn="ctr"/>
             <a:r>
-              <a:rPr sz="1800" b="1">
+              <a:rPr sz="2400" b="1">
                 <a:solidFill>
                   <a:srgbClr val="F4F1EA"/>
                 </a:solidFill>
